--- a/public/ig/2026-10-31-listas/stories-canva.pptx
+++ b/public/ig/2026-10-31-listas/stories-canva.pptx
@@ -3109,7 +3109,7 @@
         <p:spPr>
           <a:xfrm>
             <a:off x="0" y="0"/>
-            <a:ext cx="10287000" cy="13167359"/>
+            <a:ext cx="10287000" cy="10058400"/>
           </a:xfrm>
           <a:prstGeom prst="rect">
             <a:avLst/>
@@ -3143,16 +3143,40 @@
           </a:p>
         </p:txBody>
       </p:sp>
-      <p:sp>
-        <p:nvSpPr>
-          <p:cNvPr id="3" name="TextBox 2"/>
+      <p:pic>
+        <p:nvPicPr>
+          <p:cNvPr id="3" name="Picture 2" descr="image.jpg"/>
+          <p:cNvPicPr>
+            <a:picLocks noChangeAspect="1"/>
+          </p:cNvPicPr>
+          <p:nvPr/>
+        </p:nvPicPr>
+        <p:blipFill>
+          <a:blip r:embed="rId2"/>
+          <a:stretch>
+            <a:fillRect/>
+          </a:stretch>
+        </p:blipFill>
+        <p:spPr>
+          <a:xfrm>
+            <a:off x="0" y="0"/>
+            <a:ext cx="10287000" cy="10058400"/>
+          </a:xfrm>
+          <a:prstGeom prst="rect">
+            <a:avLst/>
+          </a:prstGeom>
+        </p:spPr>
+      </p:pic>
+      <p:sp>
+        <p:nvSpPr>
+          <p:cNvPr id="4" name="TextBox 3"/>
           <p:cNvSpPr txBox="1"/>
           <p:nvPr/>
         </p:nvSpPr>
         <p:spPr>
           <a:xfrm>
-            <a:off x="1524000" y="5154929"/>
-            <a:ext cx="7239000" cy="2857500"/>
+            <a:off x="914400" y="10344150"/>
+            <a:ext cx="8458200" cy="6419850"/>
           </a:xfrm>
           <a:prstGeom prst="rect">
             <a:avLst/>
@@ -3165,41 +3189,6 @@
           </a:bodyPr>
           <a:lstStyle/>
           <a:p>
-            <a:pPr algn="ctr"/>
-            <a:r>
-              <a:rPr sz="2200" i="0">
-                <a:solidFill>
-                  <a:srgbClr val="22232B"/>
-                </a:solidFill>
-                <a:latin typeface="Jost"/>
-              </a:rPr>
-              <a:t>Aquí va una foto: una taza de café junto a una libreta abierta y luz de mañana (vuestra mesa de fin de semana; sin caras de novios)</a:t>
-            </a:r>
-          </a:p>
-        </p:txBody>
-      </p:sp>
-      <p:sp>
-        <p:nvSpPr>
-          <p:cNvPr id="4" name="TextBox 3"/>
-          <p:cNvSpPr txBox="1"/>
-          <p:nvPr/>
-        </p:nvSpPr>
-        <p:spPr>
-          <a:xfrm>
-            <a:off x="914400" y="13453109"/>
-            <a:ext cx="8458200" cy="3310890"/>
-          </a:xfrm>
-          <a:prstGeom prst="rect">
-            <a:avLst/>
-          </a:prstGeom>
-          <a:noFill/>
-        </p:spPr>
-        <p:txBody>
-          <a:bodyPr wrap="square" anchor="ctr" lIns="0" rIns="0" tIns="0" bIns="0">
-            <a:spAutoFit/>
-          </a:bodyPr>
-          <a:lstStyle/>
-          <a:p>
             <a:pPr algn="ctr">
               <a:spcAft>
                 <a:spcPts val="3000"/>
@@ -3241,16 +3230,16 @@
             </a:r>
           </a:p>
           <a:p>
-            <a:pPr>
+            <a:pPr algn="ctr">
               <a:lnSpc>
                 <a:spcPct val="140000"/>
               </a:lnSpc>
               <a:spcBef>
-                <a:spcPts val="3600"/>
+                <a:spcPts val="2000"/>
               </a:spcBef>
             </a:pPr>
             <a:r>
-              <a:rPr sz="2800" i="0">
+              <a:rPr sz="2500" i="0">
                 <a:solidFill>
                   <a:srgbClr val="6B6D78"/>
                 </a:solidFill>
@@ -3296,7 +3285,7 @@
         <p:spPr>
           <a:xfrm>
             <a:off x="0" y="0"/>
-            <a:ext cx="10287000" cy="13167359"/>
+            <a:ext cx="10287000" cy="10058400"/>
           </a:xfrm>
           <a:prstGeom prst="rect">
             <a:avLst/>
@@ -3330,16 +3319,40 @@
           </a:p>
         </p:txBody>
       </p:sp>
-      <p:sp>
-        <p:nvSpPr>
-          <p:cNvPr id="3" name="TextBox 2"/>
+      <p:pic>
+        <p:nvPicPr>
+          <p:cNvPr id="3" name="Picture 2" descr="image.jpg"/>
+          <p:cNvPicPr>
+            <a:picLocks noChangeAspect="1"/>
+          </p:cNvPicPr>
+          <p:nvPr/>
+        </p:nvPicPr>
+        <p:blipFill>
+          <a:blip r:embed="rId2"/>
+          <a:stretch>
+            <a:fillRect/>
+          </a:stretch>
+        </p:blipFill>
+        <p:spPr>
+          <a:xfrm>
+            <a:off x="1120139" y="0"/>
+            <a:ext cx="8046720" cy="10058400"/>
+          </a:xfrm>
+          <a:prstGeom prst="rect">
+            <a:avLst/>
+          </a:prstGeom>
+        </p:spPr>
+      </p:pic>
+      <p:sp>
+        <p:nvSpPr>
+          <p:cNvPr id="4" name="TextBox 3"/>
           <p:cNvSpPr txBox="1"/>
           <p:nvPr/>
         </p:nvSpPr>
         <p:spPr>
           <a:xfrm>
-            <a:off x="1524000" y="5154929"/>
-            <a:ext cx="7239000" cy="2857500"/>
+            <a:off x="914400" y="10344150"/>
+            <a:ext cx="8458200" cy="6419850"/>
           </a:xfrm>
           <a:prstGeom prst="rect">
             <a:avLst/>
@@ -3352,41 +3365,6 @@
           </a:bodyPr>
           <a:lstStyle/>
           <a:p>
-            <a:pPr algn="ctr"/>
-            <a:r>
-              <a:rPr sz="2200" i="0">
-                <a:solidFill>
-                  <a:srgbClr val="22232B"/>
-                </a:solidFill>
-                <a:latin typeface="Jost"/>
-              </a:rPr>
-              <a:t>Aquí va una foto: captura de la web: sección del Wedding Planner Bootcamp dentro de un móvil</a:t>
-            </a:r>
-          </a:p>
-        </p:txBody>
-      </p:sp>
-      <p:sp>
-        <p:nvSpPr>
-          <p:cNvPr id="4" name="TextBox 3"/>
-          <p:cNvSpPr txBox="1"/>
-          <p:nvPr/>
-        </p:nvSpPr>
-        <p:spPr>
-          <a:xfrm>
-            <a:off x="914400" y="13453109"/>
-            <a:ext cx="8458200" cy="3310890"/>
-          </a:xfrm>
-          <a:prstGeom prst="rect">
-            <a:avLst/>
-          </a:prstGeom>
-          <a:noFill/>
-        </p:spPr>
-        <p:txBody>
-          <a:bodyPr wrap="square" anchor="ctr" lIns="0" rIns="0" tIns="0" bIns="0">
-            <a:spAutoFit/>
-          </a:bodyPr>
-          <a:lstStyle/>
-          <a:p>
             <a:pPr algn="ctr">
               <a:spcAft>
                 <a:spcPts val="3000"/>
@@ -3428,16 +3406,16 @@
             </a:r>
           </a:p>
           <a:p>
-            <a:pPr>
+            <a:pPr algn="ctr">
               <a:lnSpc>
                 <a:spcPct val="140000"/>
               </a:lnSpc>
               <a:spcBef>
-                <a:spcPts val="3600"/>
+                <a:spcPts val="2000"/>
               </a:spcBef>
             </a:pPr>
             <a:r>
-              <a:rPr sz="2800" i="0">
+              <a:rPr sz="2500" i="0">
                 <a:solidFill>
                   <a:srgbClr val="6B6D78"/>
                 </a:solidFill>
@@ -3447,7 +3425,7 @@
             </a:r>
             <a:br/>
             <a:r>
-              <a:rPr sz="2800" i="0">
+              <a:rPr sz="2500" i="0">
                 <a:solidFill>
                   <a:srgbClr val="6B6D78"/>
                 </a:solidFill>
@@ -3486,14 +3464,81 @@
       <p:grpSpPr/>
       <p:sp>
         <p:nvSpPr>
-          <p:cNvPr id="2" name="TextBox 1"/>
+          <p:cNvPr id="2" name="Rectangle 1"/>
+          <p:cNvSpPr/>
+          <p:nvPr/>
+        </p:nvSpPr>
+        <p:spPr>
+          <a:xfrm>
+            <a:off x="0" y="0"/>
+            <a:ext cx="10287000" cy="8412480"/>
+          </a:xfrm>
+          <a:prstGeom prst="rect">
+            <a:avLst/>
+          </a:prstGeom>
+          <a:solidFill>
+            <a:srgbClr val="F3F3F5"/>
+          </a:solidFill>
+          <a:ln>
+            <a:noFill/>
+          </a:ln>
+        </p:spPr>
+        <p:style>
+          <a:lnRef idx="1">
+            <a:schemeClr val="accent1"/>
+          </a:lnRef>
+          <a:fillRef idx="3">
+            <a:schemeClr val="accent1"/>
+          </a:fillRef>
+          <a:effectRef idx="2">
+            <a:schemeClr val="accent1"/>
+          </a:effectRef>
+          <a:fontRef idx="minor">
+            <a:schemeClr val="lt1"/>
+          </a:fontRef>
+        </p:style>
+        <p:txBody>
+          <a:bodyPr rtlCol="0" anchor="ctr"/>
+          <a:lstStyle/>
+          <a:p>
+            <a:pPr algn="ctr"/>
+          </a:p>
+        </p:txBody>
+      </p:sp>
+      <p:pic>
+        <p:nvPicPr>
+          <p:cNvPr id="3" name="Picture 2" descr="image.jpg"/>
+          <p:cNvPicPr>
+            <a:picLocks noChangeAspect="1"/>
+          </p:cNvPicPr>
+          <p:nvPr/>
+        </p:nvPicPr>
+        <p:blipFill>
+          <a:blip r:embed="rId2"/>
+          <a:stretch>
+            <a:fillRect/>
+          </a:stretch>
+        </p:blipFill>
+        <p:spPr>
+          <a:xfrm>
+            <a:off x="0" y="0"/>
+            <a:ext cx="10287000" cy="8412480"/>
+          </a:xfrm>
+          <a:prstGeom prst="rect">
+            <a:avLst/>
+          </a:prstGeom>
+        </p:spPr>
+      </p:pic>
+      <p:sp>
+        <p:nvSpPr>
+          <p:cNvPr id="4" name="TextBox 3"/>
           <p:cNvSpPr txBox="1"/>
           <p:nvPr/>
         </p:nvSpPr>
         <p:spPr>
           <a:xfrm>
-            <a:off x="914400" y="1047750"/>
-            <a:ext cx="8458200" cy="15144750"/>
+            <a:off x="914400" y="8698230"/>
+            <a:ext cx="8458200" cy="8065770"/>
           </a:xfrm>
           <a:prstGeom prst="rect">
             <a:avLst/>
@@ -3506,7 +3551,7 @@
           </a:bodyPr>
           <a:lstStyle/>
           <a:p>
-            <a:pPr>
+            <a:pPr algn="ctr">
               <a:spcAft>
                 <a:spcPts val="3000"/>
               </a:spcAft>
@@ -3522,13 +3567,13 @@
             </a:r>
           </a:p>
           <a:p>
-            <a:pPr>
+            <a:pPr algn="ctr">
               <a:lnSpc>
                 <a:spcPct val="100000"/>
               </a:lnSpc>
             </a:pPr>
             <a:r>
-              <a:rPr sz="7200" i="0">
+              <a:rPr sz="5700" i="0">
                 <a:solidFill>
                   <a:srgbClr val="22232B"/>
                 </a:solidFill>
@@ -3537,7 +3582,7 @@
               <a:t>Domingo de </a:t>
             </a:r>
             <a:r>
-              <a:rPr sz="7200" i="1">
+              <a:rPr sz="5700" i="1">
                 <a:solidFill>
                   <a:srgbClr val="22232B"/>
                 </a:solidFill>
@@ -3546,7 +3591,7 @@
               <a:t>planificar</a:t>
             </a:r>
             <a:r>
-              <a:rPr sz="7200" i="0">
+              <a:rPr sz="5700" i="0">
                 <a:solidFill>
                   <a:srgbClr val="22232B"/>
                 </a:solidFill>
@@ -3556,16 +3601,16 @@
             </a:r>
           </a:p>
           <a:p>
-            <a:pPr>
+            <a:pPr algn="ctr">
               <a:lnSpc>
                 <a:spcPct val="140000"/>
               </a:lnSpc>
               <a:spcBef>
-                <a:spcPts val="3600"/>
+                <a:spcPts val="2000"/>
               </a:spcBef>
             </a:pPr>
             <a:r>
-              <a:rPr sz="2800" i="0">
+              <a:rPr sz="2500" i="0">
                 <a:solidFill>
                   <a:srgbClr val="6B6D78"/>
                 </a:solidFill>
@@ -3627,7 +3672,7 @@
         <p:spPr>
           <a:xfrm>
             <a:off x="0" y="0"/>
-            <a:ext cx="10287000" cy="13167359"/>
+            <a:ext cx="10287000" cy="10058400"/>
           </a:xfrm>
           <a:prstGeom prst="rect">
             <a:avLst/>
@@ -3661,16 +3706,40 @@
           </a:p>
         </p:txBody>
       </p:sp>
-      <p:sp>
-        <p:nvSpPr>
-          <p:cNvPr id="3" name="TextBox 2"/>
+      <p:pic>
+        <p:nvPicPr>
+          <p:cNvPr id="3" name="Picture 2" descr="image.jpg"/>
+          <p:cNvPicPr>
+            <a:picLocks noChangeAspect="1"/>
+          </p:cNvPicPr>
+          <p:nvPr/>
+        </p:nvPicPr>
+        <p:blipFill>
+          <a:blip r:embed="rId2"/>
+          <a:stretch>
+            <a:fillRect/>
+          </a:stretch>
+        </p:blipFill>
+        <p:spPr>
+          <a:xfrm>
+            <a:off x="1120139" y="0"/>
+            <a:ext cx="8046720" cy="10058400"/>
+          </a:xfrm>
+          <a:prstGeom prst="rect">
+            <a:avLst/>
+          </a:prstGeom>
+        </p:spPr>
+      </p:pic>
+      <p:sp>
+        <p:nvSpPr>
+          <p:cNvPr id="4" name="TextBox 3"/>
           <p:cNvSpPr txBox="1"/>
           <p:nvPr/>
         </p:nvSpPr>
         <p:spPr>
           <a:xfrm>
-            <a:off x="1524000" y="5154929"/>
-            <a:ext cx="7239000" cy="2857500"/>
+            <a:off x="914400" y="10344150"/>
+            <a:ext cx="8458200" cy="6419850"/>
           </a:xfrm>
           <a:prstGeom prst="rect">
             <a:avLst/>
@@ -3683,41 +3752,6 @@
           </a:bodyPr>
           <a:lstStyle/>
           <a:p>
-            <a:pPr algn="ctr"/>
-            <a:r>
-              <a:rPr sz="2200" i="0">
-                <a:solidFill>
-                  <a:srgbClr val="22232B"/>
-                </a:solidFill>
-                <a:latin typeface="Jost"/>
-              </a:rPr>
-              <a:t>Aquí va una foto: captura de la web: precio del Wedding Planner Bootcamp dentro de un móvil</a:t>
-            </a:r>
-          </a:p>
-        </p:txBody>
-      </p:sp>
-      <p:sp>
-        <p:nvSpPr>
-          <p:cNvPr id="4" name="TextBox 3"/>
-          <p:cNvSpPr txBox="1"/>
-          <p:nvPr/>
-        </p:nvSpPr>
-        <p:spPr>
-          <a:xfrm>
-            <a:off x="914400" y="13453109"/>
-            <a:ext cx="8458200" cy="3310890"/>
-          </a:xfrm>
-          <a:prstGeom prst="rect">
-            <a:avLst/>
-          </a:prstGeom>
-          <a:noFill/>
-        </p:spPr>
-        <p:txBody>
-          <a:bodyPr wrap="square" anchor="ctr" lIns="0" rIns="0" tIns="0" bIns="0">
-            <a:spAutoFit/>
-          </a:bodyPr>
-          <a:lstStyle/>
-          <a:p>
             <a:pPr algn="ctr">
               <a:spcAft>
                 <a:spcPts val="3000"/>
@@ -3759,16 +3793,16 @@
             </a:r>
           </a:p>
           <a:p>
-            <a:pPr>
+            <a:pPr algn="ctr">
               <a:lnSpc>
                 <a:spcPct val="140000"/>
               </a:lnSpc>
               <a:spcBef>
-                <a:spcPts val="3600"/>
+                <a:spcPts val="2000"/>
               </a:spcBef>
             </a:pPr>
             <a:r>
-              <a:rPr sz="2800" i="0">
+              <a:rPr sz="2500" i="0">
                 <a:solidFill>
                   <a:srgbClr val="6B6D78"/>
                 </a:solidFill>
@@ -3778,7 +3812,7 @@
             </a:r>
             <a:br/>
             <a:r>
-              <a:rPr sz="2800" i="0">
+              <a:rPr sz="2500" i="0">
                 <a:solidFill>
                   <a:srgbClr val="6B6D78"/>
                 </a:solidFill>
@@ -3817,14 +3851,81 @@
       <p:grpSpPr/>
       <p:sp>
         <p:nvSpPr>
-          <p:cNvPr id="2" name="TextBox 1"/>
+          <p:cNvPr id="2" name="Rectangle 1"/>
+          <p:cNvSpPr/>
+          <p:nvPr/>
+        </p:nvSpPr>
+        <p:spPr>
+          <a:xfrm>
+            <a:off x="0" y="0"/>
+            <a:ext cx="10287000" cy="8412480"/>
+          </a:xfrm>
+          <a:prstGeom prst="rect">
+            <a:avLst/>
+          </a:prstGeom>
+          <a:solidFill>
+            <a:srgbClr val="F2E8E8"/>
+          </a:solidFill>
+          <a:ln>
+            <a:noFill/>
+          </a:ln>
+        </p:spPr>
+        <p:style>
+          <a:lnRef idx="1">
+            <a:schemeClr val="accent1"/>
+          </a:lnRef>
+          <a:fillRef idx="3">
+            <a:schemeClr val="accent1"/>
+          </a:fillRef>
+          <a:effectRef idx="2">
+            <a:schemeClr val="accent1"/>
+          </a:effectRef>
+          <a:fontRef idx="minor">
+            <a:schemeClr val="lt1"/>
+          </a:fontRef>
+        </p:style>
+        <p:txBody>
+          <a:bodyPr rtlCol="0" anchor="ctr"/>
+          <a:lstStyle/>
+          <a:p>
+            <a:pPr algn="ctr"/>
+          </a:p>
+        </p:txBody>
+      </p:sp>
+      <p:pic>
+        <p:nvPicPr>
+          <p:cNvPr id="3" name="Picture 2" descr="image.jpg"/>
+          <p:cNvPicPr>
+            <a:picLocks noChangeAspect="1"/>
+          </p:cNvPicPr>
+          <p:nvPr/>
+        </p:nvPicPr>
+        <p:blipFill>
+          <a:blip r:embed="rId2"/>
+          <a:stretch>
+            <a:fillRect/>
+          </a:stretch>
+        </p:blipFill>
+        <p:spPr>
+          <a:xfrm>
+            <a:off x="0" y="0"/>
+            <a:ext cx="10287000" cy="8412480"/>
+          </a:xfrm>
+          <a:prstGeom prst="rect">
+            <a:avLst/>
+          </a:prstGeom>
+        </p:spPr>
+      </p:pic>
+      <p:sp>
+        <p:nvSpPr>
+          <p:cNvPr id="4" name="TextBox 3"/>
           <p:cNvSpPr txBox="1"/>
           <p:nvPr/>
         </p:nvSpPr>
         <p:spPr>
           <a:xfrm>
-            <a:off x="914400" y="1047750"/>
-            <a:ext cx="8458200" cy="15144750"/>
+            <a:off x="914400" y="8698230"/>
+            <a:ext cx="8458200" cy="8065770"/>
           </a:xfrm>
           <a:prstGeom prst="rect">
             <a:avLst/>
@@ -3837,7 +3938,7 @@
           </a:bodyPr>
           <a:lstStyle/>
           <a:p>
-            <a:pPr>
+            <a:pPr algn="ctr">
               <a:spcAft>
                 <a:spcPts val="3000"/>
               </a:spcAft>
@@ -3853,13 +3954,13 @@
             </a:r>
           </a:p>
           <a:p>
-            <a:pPr>
+            <a:pPr algn="ctr">
               <a:lnSpc>
                 <a:spcPct val="100000"/>
               </a:lnSpc>
             </a:pPr>
             <a:r>
-              <a:rPr sz="7200" i="0">
+              <a:rPr sz="5700" i="0">
                 <a:solidFill>
                   <a:srgbClr val="F3F3F5"/>
                 </a:solidFill>
@@ -3868,7 +3969,7 @@
               <a:t>¿Empiezas </a:t>
             </a:r>
             <a:r>
-              <a:rPr sz="7200" i="1">
+              <a:rPr sz="5700" i="1">
                 <a:solidFill>
                   <a:srgbClr val="F3F3F5"/>
                 </a:solidFill>
@@ -3877,7 +3978,7 @@
               <a:t>el lunes</a:t>
             </a:r>
             <a:r>
-              <a:rPr sz="7200" i="0">
+              <a:rPr sz="5700" i="0">
                 <a:solidFill>
                   <a:srgbClr val="F3F3F5"/>
                 </a:solidFill>
@@ -3887,16 +3988,16 @@
             </a:r>
           </a:p>
           <a:p>
-            <a:pPr>
+            <a:pPr algn="ctr">
               <a:lnSpc>
                 <a:spcPct val="140000"/>
               </a:lnSpc>
               <a:spcBef>
-                <a:spcPts val="3600"/>
+                <a:spcPts val="2000"/>
               </a:spcBef>
             </a:pPr>
             <a:r>
-              <a:rPr sz="2800" i="0">
+              <a:rPr sz="2500" i="0">
                 <a:solidFill>
                   <a:srgbClr val="F3F3F5"/>
                 </a:solidFill>
@@ -3906,9 +4007,9 @@
             </a:r>
           </a:p>
           <a:p>
-            <a:pPr>
+            <a:pPr algn="ctr">
               <a:spcBef>
-                <a:spcPts val="4800"/>
+                <a:spcPts val="2800"/>
               </a:spcBef>
             </a:pPr>
             <a:r>
